--- a/docs/pptx/entire/ritu-entire-scatter-egfr-cg.pptx
+++ b/docs/pptx/entire/ritu-entire-scatter-egfr-cg.pptx
@@ -4760,7 +4760,7 @@
           </p:nvSpPr>
           <p:spPr>
             <a:xfrm>
-              <a:off x="2271648" y="2517433"/>
+              <a:off x="2271650" y="2517434"/>
               <a:ext cx="49651" cy="49651"/>
             </a:xfrm>
             <a:prstGeom prst="ellipse">
@@ -29820,7 +29820,7 @@
           </p:nvSpPr>
           <p:spPr>
             <a:xfrm>
-              <a:off x="4079616" y="3051489"/>
+              <a:off x="4079612" y="3051486"/>
               <a:ext cx="49651" cy="49651"/>
             </a:xfrm>
             <a:prstGeom prst="ellipse">
@@ -36256,7 +36256,7 @@
                     <a:pt x="5713207" y="1798439"/>
                   </a:lnTo>
                   <a:lnTo>
-                    <a:pt x="5801102" y="1825252"/>
+                    <a:pt x="5801102" y="1825251"/>
                   </a:lnTo>
                   <a:lnTo>
                     <a:pt x="5888998" y="1852063"/>
@@ -36322,7 +36322,7 @@
                     <a:pt x="6328475" y="2194375"/>
                   </a:lnTo>
                   <a:lnTo>
-                    <a:pt x="6240580" y="2163971"/>
+                    <a:pt x="6240580" y="2163970"/>
                   </a:lnTo>
                   <a:lnTo>
                     <a:pt x="6152684" y="2133567"/>
@@ -36767,7 +36767,7 @@
                     <a:pt x="5713207" y="1798439"/>
                   </a:lnTo>
                   <a:lnTo>
-                    <a:pt x="5801102" y="1825252"/>
+                    <a:pt x="5801102" y="1825251"/>
                   </a:lnTo>
                   <a:lnTo>
                     <a:pt x="5888998" y="1852063"/>
